--- a/Ch09_Franco_Flemish.pptx
+++ b/Ch09_Franco_Flemish.pptx
@@ -4483,7 +4483,7 @@
                 <a:ea typeface="Georgia" pitchFamily="34" charset="-122"/>
                 <a:cs typeface="Georgia" pitchFamily="34" charset="-120"/>
               </a:rPr>
-              <a:t>Missa L'homme armé super voces musicales</a:t>
+              <a:t>Missa L'homme armé s.v.m.</a:t>
             </a:r>
             <a:endParaRPr lang="en-US" sz="1400" dirty="0"/>
           </a:p>
@@ -4561,7 +4561,7 @@
                 <a:ea typeface="Calibri" pitchFamily="34" charset="-122"/>
                 <a:cs typeface="Calibri" pitchFamily="34" charset="-120"/>
               </a:rPr>
-              <a:t>將 L'homme armé 曲調依序置於六個六音音階位置（ut–la）——技巧高超的系統性建構</a:t>
+              <a:t>將 L'homme armé 曲調依序置於六個六音音階位置（ut–la）——技巧高超的系統性建構（super voces musicales）</a:t>
             </a:r>
             <a:endParaRPr lang="en-US" sz="1400" dirty="0"/>
           </a:p>
